--- a/templates/t3_jugyo_nagare.pptx
+++ b/templates/t3_jugyo_nagare.pptx
@@ -4782,7 +4782,7 @@
                 </a:solidFill>
                 <a:latin typeface="BIZ UDPゴシック"/>
               </a:rPr>
-              <a:t>きく人は、あいての ほうを 見る</a:t>
+              <a:t>きく人は あいての ほうを 見る</a:t>
             </a:r>
           </a:p>
         </p:txBody>
@@ -4904,7 +4904,7 @@
                 </a:solidFill>
                 <a:latin typeface="BIZ UDPゴシック"/>
               </a:rPr>
-              <a:t>おわったら、手を あげる</a:t>
+              <a:t>おわったら 手を あげる</a:t>
             </a:r>
           </a:p>
         </p:txBody>
@@ -5008,7 +5008,7 @@
                 </a:solidFill>
                 <a:latin typeface="BIZ UDPゴシック"/>
               </a:rPr>
-              <a:t>きょうの「なるほど」を 1つ、ノートに。</a:t>
+              <a:t>きょうの「なるほど」を 1つ ノートに</a:t>
             </a:r>
           </a:p>
         </p:txBody>
